--- a/docs/ppt/grant_pctdiffcg_distribution.pptx
+++ b/docs/ppt/grant_pctdiffcg_distribution.pptx
@@ -3730,7 +3730,7 @@
           </p:nvSpPr>
           <p:spPr>
             <a:xfrm>
-              <a:off x="4779543" y="1544888"/>
+              <a:off x="4145218" y="1544888"/>
               <a:ext cx="0" cy="3849387"/>
             </a:xfrm>
             <a:custGeom>
@@ -3751,7 +3751,7 @@
             </a:custGeom>
             <a:ln w="13550" cap="flat">
               <a:solidFill>
-                <a:srgbClr val="595959">
+                <a:srgbClr val="000000">
                   <a:alpha val="100000"/>
                 </a:srgbClr>
               </a:solidFill>
@@ -3767,50 +3767,7 @@
         </p:sp>
         <p:sp>
           <p:nvSpPr>
-            <p:cNvPr id="43" name="pl43"/>
-            <p:cNvSpPr/>
-            <p:nvPr/>
-          </p:nvSpPr>
-          <p:spPr>
-            <a:xfrm>
-              <a:off x="4508334" y="1544888"/>
-              <a:ext cx="0" cy="3849387"/>
-            </a:xfrm>
-            <a:custGeom>
-              <a:avLst/>
-              <a:pathLst>
-                <a:path w="0" h="3849387">
-                  <a:moveTo>
-                    <a:pt x="0" y="3849387"/>
-                  </a:moveTo>
-                  <a:lnTo>
-                    <a:pt x="0" y="0"/>
-                  </a:lnTo>
-                  <a:lnTo>
-                    <a:pt x="0" y="0"/>
-                  </a:lnTo>
-                </a:path>
-              </a:pathLst>
-            </a:custGeom>
-            <a:ln w="13550" cap="flat">
-              <a:solidFill>
-                <a:srgbClr val="333333">
-                  <a:alpha val="100000"/>
-                </a:srgbClr>
-              </a:solidFill>
-              <a:prstDash val="solid"/>
-              <a:round/>
-            </a:ln>
-          </p:spPr>
-          <p:txBody>
-            <a:bodyPr/>
-            <a:lstStyle/>
-            <a:p/>
-          </p:txBody>
-        </p:sp>
-        <p:sp>
-          <p:nvSpPr>
-            <p:cNvPr id="44" name="tx44"/>
+            <p:cNvPr id="43" name="tx43"/>
             <p:cNvSpPr/>
             <p:nvPr/>
           </p:nvSpPr>
@@ -3856,7 +3813,7 @@
         </p:sp>
         <p:sp>
           <p:nvSpPr>
-            <p:cNvPr id="45" name="tx45"/>
+            <p:cNvPr id="44" name="tx44"/>
             <p:cNvSpPr/>
             <p:nvPr/>
           </p:nvSpPr>
@@ -3902,7 +3859,7 @@
         </p:sp>
         <p:sp>
           <p:nvSpPr>
-            <p:cNvPr id="46" name="tx46"/>
+            <p:cNvPr id="45" name="tx45"/>
             <p:cNvSpPr/>
             <p:nvPr/>
           </p:nvSpPr>
@@ -3948,14 +3905,14 @@
         </p:sp>
         <p:sp>
           <p:nvSpPr>
-            <p:cNvPr id="47" name="tx47"/>
-            <p:cNvSpPr/>
-            <p:nvPr/>
-          </p:nvSpPr>
-          <p:spPr>
-            <a:xfrm>
-              <a:off x="892805" y="5456905"/>
-              <a:ext cx="161574" cy="80101"/>
+            <p:cNvPr id="46" name="tx46"/>
+            <p:cNvSpPr/>
+            <p:nvPr/>
+          </p:nvSpPr>
+          <p:spPr>
+            <a:xfrm>
+              <a:off x="843153" y="5456905"/>
+              <a:ext cx="260878" cy="80101"/>
             </a:xfrm>
             <a:prstGeom prst="rect">
               <a:avLst/>
@@ -3987,21 +3944,21 @@
                   <a:latin typeface="Helvetica"/>
                   <a:cs typeface="Helvetica"/>
                 </a:rPr>
-                <a:t>-60</a:t>
+                <a:t>-60%</a:t>
               </a:r>
             </a:p>
           </p:txBody>
         </p:sp>
         <p:sp>
           <p:nvSpPr>
-            <p:cNvPr id="48" name="tx48"/>
-            <p:cNvSpPr/>
-            <p:nvPr/>
-          </p:nvSpPr>
-          <p:spPr>
-            <a:xfrm>
-              <a:off x="1527130" y="5456905"/>
-              <a:ext cx="161574" cy="80101"/>
+            <p:cNvPr id="47" name="tx47"/>
+            <p:cNvSpPr/>
+            <p:nvPr/>
+          </p:nvSpPr>
+          <p:spPr>
+            <a:xfrm>
+              <a:off x="1477478" y="5456905"/>
+              <a:ext cx="260878" cy="80101"/>
             </a:xfrm>
             <a:prstGeom prst="rect">
               <a:avLst/>
@@ -4033,21 +3990,21 @@
                   <a:latin typeface="Helvetica"/>
                   <a:cs typeface="Helvetica"/>
                 </a:rPr>
-                <a:t>-50</a:t>
+                <a:t>-50%</a:t>
               </a:r>
             </a:p>
           </p:txBody>
         </p:sp>
         <p:sp>
           <p:nvSpPr>
-            <p:cNvPr id="49" name="tx49"/>
-            <p:cNvSpPr/>
-            <p:nvPr/>
-          </p:nvSpPr>
-          <p:spPr>
-            <a:xfrm>
-              <a:off x="2161455" y="5456905"/>
-              <a:ext cx="161574" cy="80101"/>
+            <p:cNvPr id="48" name="tx48"/>
+            <p:cNvSpPr/>
+            <p:nvPr/>
+          </p:nvSpPr>
+          <p:spPr>
+            <a:xfrm>
+              <a:off x="2111803" y="5456905"/>
+              <a:ext cx="260878" cy="80101"/>
             </a:xfrm>
             <a:prstGeom prst="rect">
               <a:avLst/>
@@ -4079,21 +4036,21 @@
                   <a:latin typeface="Helvetica"/>
                   <a:cs typeface="Helvetica"/>
                 </a:rPr>
-                <a:t>-40</a:t>
+                <a:t>-40%</a:t>
               </a:r>
             </a:p>
           </p:txBody>
         </p:sp>
         <p:sp>
           <p:nvSpPr>
-            <p:cNvPr id="50" name="tx50"/>
-            <p:cNvSpPr/>
-            <p:nvPr/>
-          </p:nvSpPr>
-          <p:spPr>
-            <a:xfrm>
-              <a:off x="2795780" y="5456905"/>
-              <a:ext cx="161574" cy="80101"/>
+            <p:cNvPr id="49" name="tx49"/>
+            <p:cNvSpPr/>
+            <p:nvPr/>
+          </p:nvSpPr>
+          <p:spPr>
+            <a:xfrm>
+              <a:off x="2746128" y="5456905"/>
+              <a:ext cx="260878" cy="80101"/>
             </a:xfrm>
             <a:prstGeom prst="rect">
               <a:avLst/>
@@ -4125,21 +4082,21 @@
                   <a:latin typeface="Helvetica"/>
                   <a:cs typeface="Helvetica"/>
                 </a:rPr>
-                <a:t>-30</a:t>
+                <a:t>-30%</a:t>
               </a:r>
             </a:p>
           </p:txBody>
         </p:sp>
         <p:sp>
           <p:nvSpPr>
-            <p:cNvPr id="51" name="tx51"/>
-            <p:cNvSpPr/>
-            <p:nvPr/>
-          </p:nvSpPr>
-          <p:spPr>
-            <a:xfrm>
-              <a:off x="3430106" y="5456905"/>
-              <a:ext cx="161574" cy="80101"/>
+            <p:cNvPr id="50" name="tx50"/>
+            <p:cNvSpPr/>
+            <p:nvPr/>
+          </p:nvSpPr>
+          <p:spPr>
+            <a:xfrm>
+              <a:off x="3380454" y="5456905"/>
+              <a:ext cx="260878" cy="80101"/>
             </a:xfrm>
             <a:prstGeom prst="rect">
               <a:avLst/>
@@ -4171,21 +4128,21 @@
                   <a:latin typeface="Helvetica"/>
                   <a:cs typeface="Helvetica"/>
                 </a:rPr>
-                <a:t>-20</a:t>
+                <a:t>-20%</a:t>
               </a:r>
             </a:p>
           </p:txBody>
         </p:sp>
         <p:sp>
           <p:nvSpPr>
-            <p:cNvPr id="52" name="tx52"/>
-            <p:cNvSpPr/>
-            <p:nvPr/>
-          </p:nvSpPr>
-          <p:spPr>
-            <a:xfrm>
-              <a:off x="4064431" y="5456905"/>
-              <a:ext cx="161574" cy="80101"/>
+            <p:cNvPr id="51" name="tx51"/>
+            <p:cNvSpPr/>
+            <p:nvPr/>
+          </p:nvSpPr>
+          <p:spPr>
+            <a:xfrm>
+              <a:off x="4014779" y="5456905"/>
+              <a:ext cx="260878" cy="80101"/>
             </a:xfrm>
             <a:prstGeom prst="rect">
               <a:avLst/>
@@ -4217,21 +4174,21 @@
                   <a:latin typeface="Helvetica"/>
                   <a:cs typeface="Helvetica"/>
                 </a:rPr>
-                <a:t>-10</a:t>
+                <a:t>-10%</a:t>
               </a:r>
             </a:p>
           </p:txBody>
         </p:sp>
         <p:sp>
           <p:nvSpPr>
-            <p:cNvPr id="53" name="tx53"/>
-            <p:cNvSpPr/>
-            <p:nvPr/>
-          </p:nvSpPr>
-          <p:spPr>
-            <a:xfrm>
-              <a:off x="4748454" y="5456905"/>
-              <a:ext cx="62179" cy="80101"/>
+            <p:cNvPr id="52" name="tx52"/>
+            <p:cNvSpPr/>
+            <p:nvPr/>
+          </p:nvSpPr>
+          <p:spPr>
+            <a:xfrm>
+              <a:off x="4698802" y="5456905"/>
+              <a:ext cx="161483" cy="80101"/>
             </a:xfrm>
             <a:prstGeom prst="rect">
               <a:avLst/>
@@ -4263,21 +4220,21 @@
                   <a:latin typeface="Helvetica"/>
                   <a:cs typeface="Helvetica"/>
                 </a:rPr>
-                <a:t>0</a:t>
+                <a:t>0%</a:t>
               </a:r>
             </a:p>
           </p:txBody>
         </p:sp>
         <p:sp>
           <p:nvSpPr>
-            <p:cNvPr id="54" name="tx54"/>
-            <p:cNvSpPr/>
-            <p:nvPr/>
-          </p:nvSpPr>
-          <p:spPr>
-            <a:xfrm>
-              <a:off x="5351689" y="5456905"/>
-              <a:ext cx="124358" cy="80101"/>
+            <p:cNvPr id="53" name="tx53"/>
+            <p:cNvSpPr/>
+            <p:nvPr/>
+          </p:nvSpPr>
+          <p:spPr>
+            <a:xfrm>
+              <a:off x="5302037" y="5456905"/>
+              <a:ext cx="223662" cy="80101"/>
             </a:xfrm>
             <a:prstGeom prst="rect">
               <a:avLst/>
@@ -4309,21 +4266,21 @@
                   <a:latin typeface="Helvetica"/>
                   <a:cs typeface="Helvetica"/>
                 </a:rPr>
-                <a:t>10</a:t>
+                <a:t>10%</a:t>
               </a:r>
             </a:p>
           </p:txBody>
         </p:sp>
         <p:sp>
           <p:nvSpPr>
-            <p:cNvPr id="55" name="tx55"/>
-            <p:cNvSpPr/>
-            <p:nvPr/>
-          </p:nvSpPr>
-          <p:spPr>
-            <a:xfrm>
-              <a:off x="5986014" y="5456905"/>
-              <a:ext cx="124358" cy="80101"/>
+            <p:cNvPr id="54" name="tx54"/>
+            <p:cNvSpPr/>
+            <p:nvPr/>
+          </p:nvSpPr>
+          <p:spPr>
+            <a:xfrm>
+              <a:off x="5936362" y="5456905"/>
+              <a:ext cx="223662" cy="80101"/>
             </a:xfrm>
             <a:prstGeom prst="rect">
               <a:avLst/>
@@ -4355,21 +4312,21 @@
                   <a:latin typeface="Helvetica"/>
                   <a:cs typeface="Helvetica"/>
                 </a:rPr>
-                <a:t>20</a:t>
+                <a:t>20%</a:t>
               </a:r>
             </a:p>
           </p:txBody>
         </p:sp>
         <p:sp>
           <p:nvSpPr>
-            <p:cNvPr id="56" name="tx56"/>
-            <p:cNvSpPr/>
-            <p:nvPr/>
-          </p:nvSpPr>
-          <p:spPr>
-            <a:xfrm>
-              <a:off x="6620339" y="5456905"/>
-              <a:ext cx="124358" cy="80101"/>
+            <p:cNvPr id="55" name="tx55"/>
+            <p:cNvSpPr/>
+            <p:nvPr/>
+          </p:nvSpPr>
+          <p:spPr>
+            <a:xfrm>
+              <a:off x="6570688" y="5456905"/>
+              <a:ext cx="223662" cy="80101"/>
             </a:xfrm>
             <a:prstGeom prst="rect">
               <a:avLst/>
@@ -4401,21 +4358,21 @@
                   <a:latin typeface="Helvetica"/>
                   <a:cs typeface="Helvetica"/>
                 </a:rPr>
-                <a:t>30</a:t>
+                <a:t>30%</a:t>
               </a:r>
             </a:p>
           </p:txBody>
         </p:sp>
         <p:sp>
           <p:nvSpPr>
-            <p:cNvPr id="57" name="tx57"/>
-            <p:cNvSpPr/>
-            <p:nvPr/>
-          </p:nvSpPr>
-          <p:spPr>
-            <a:xfrm>
-              <a:off x="7254665" y="5456905"/>
-              <a:ext cx="124358" cy="80101"/>
+            <p:cNvPr id="56" name="tx56"/>
+            <p:cNvSpPr/>
+            <p:nvPr/>
+          </p:nvSpPr>
+          <p:spPr>
+            <a:xfrm>
+              <a:off x="7205013" y="5456905"/>
+              <a:ext cx="223662" cy="80101"/>
             </a:xfrm>
             <a:prstGeom prst="rect">
               <a:avLst/>
@@ -4447,21 +4404,21 @@
                   <a:latin typeface="Helvetica"/>
                   <a:cs typeface="Helvetica"/>
                 </a:rPr>
-                <a:t>40</a:t>
+                <a:t>40%</a:t>
               </a:r>
             </a:p>
           </p:txBody>
         </p:sp>
         <p:sp>
           <p:nvSpPr>
-            <p:cNvPr id="58" name="tx58"/>
-            <p:cNvSpPr/>
-            <p:nvPr/>
-          </p:nvSpPr>
-          <p:spPr>
-            <a:xfrm>
-              <a:off x="7888990" y="5456905"/>
-              <a:ext cx="124358" cy="80101"/>
+            <p:cNvPr id="57" name="tx57"/>
+            <p:cNvSpPr/>
+            <p:nvPr/>
+          </p:nvSpPr>
+          <p:spPr>
+            <a:xfrm>
+              <a:off x="7839338" y="5456905"/>
+              <a:ext cx="223662" cy="80101"/>
             </a:xfrm>
             <a:prstGeom prst="rect">
               <a:avLst/>
@@ -4493,21 +4450,21 @@
                   <a:latin typeface="Helvetica"/>
                   <a:cs typeface="Helvetica"/>
                 </a:rPr>
-                <a:t>50</a:t>
+                <a:t>50%</a:t>
               </a:r>
             </a:p>
           </p:txBody>
         </p:sp>
         <p:sp>
           <p:nvSpPr>
-            <p:cNvPr id="59" name="tx59"/>
-            <p:cNvSpPr/>
-            <p:nvPr/>
-          </p:nvSpPr>
-          <p:spPr>
-            <a:xfrm>
-              <a:off x="8523315" y="5456905"/>
-              <a:ext cx="124358" cy="80101"/>
+            <p:cNvPr id="58" name="tx58"/>
+            <p:cNvSpPr/>
+            <p:nvPr/>
+          </p:nvSpPr>
+          <p:spPr>
+            <a:xfrm>
+              <a:off x="8473663" y="5456905"/>
+              <a:ext cx="223662" cy="80101"/>
             </a:xfrm>
             <a:prstGeom prst="rect">
               <a:avLst/>
@@ -4539,14 +4496,14 @@
                   <a:latin typeface="Helvetica"/>
                   <a:cs typeface="Helvetica"/>
                 </a:rPr>
-                <a:t>60</a:t>
+                <a:t>60%</a:t>
               </a:r>
             </a:p>
           </p:txBody>
         </p:sp>
         <p:sp>
           <p:nvSpPr>
-            <p:cNvPr id="60" name="tx60"/>
+            <p:cNvPr id="59" name="tx59"/>
             <p:cNvSpPr/>
             <p:nvPr/>
           </p:nvSpPr>
@@ -4592,7 +4549,7 @@
         </p:sp>
         <p:sp>
           <p:nvSpPr>
-            <p:cNvPr id="61" name="tx61"/>
+            <p:cNvPr id="60" name="tx60"/>
             <p:cNvSpPr/>
             <p:nvPr/>
           </p:nvSpPr>
@@ -4638,7 +4595,7 @@
         </p:sp>
         <p:sp>
           <p:nvSpPr>
-            <p:cNvPr id="62" name="tx62"/>
+            <p:cNvPr id="61" name="tx61"/>
             <p:cNvSpPr/>
             <p:nvPr/>
           </p:nvSpPr>
@@ -4684,7 +4641,7 @@
         </p:sp>
         <p:sp>
           <p:nvSpPr>
-            <p:cNvPr id="63" name="tx63"/>
+            <p:cNvPr id="62" name="tx62"/>
             <p:cNvSpPr/>
             <p:nvPr/>
           </p:nvSpPr>
@@ -6355,7 +6312,7 @@
           </p:nvSpPr>
           <p:spPr>
             <a:xfrm>
-              <a:off x="4748454" y="1544888"/>
+              <a:off x="4108990" y="1544888"/>
               <a:ext cx="0" cy="3849387"/>
             </a:xfrm>
             <a:custGeom>
@@ -6376,7 +6333,7 @@
             </a:custGeom>
             <a:ln w="13550" cap="flat">
               <a:solidFill>
-                <a:srgbClr val="595959">
+                <a:srgbClr val="000000">
                   <a:alpha val="100000"/>
                 </a:srgbClr>
               </a:solidFill>
@@ -6392,50 +6349,7 @@
         </p:sp>
         <p:sp>
           <p:nvSpPr>
-            <p:cNvPr id="45" name="pl45"/>
-            <p:cNvSpPr/>
-            <p:nvPr/>
-          </p:nvSpPr>
-          <p:spPr>
-            <a:xfrm>
-              <a:off x="4475047" y="1544888"/>
-              <a:ext cx="0" cy="3849387"/>
-            </a:xfrm>
-            <a:custGeom>
-              <a:avLst/>
-              <a:pathLst>
-                <a:path w="0" h="3849387">
-                  <a:moveTo>
-                    <a:pt x="0" y="3849387"/>
-                  </a:moveTo>
-                  <a:lnTo>
-                    <a:pt x="0" y="0"/>
-                  </a:lnTo>
-                  <a:lnTo>
-                    <a:pt x="0" y="0"/>
-                  </a:lnTo>
-                </a:path>
-              </a:pathLst>
-            </a:custGeom>
-            <a:ln w="13550" cap="flat">
-              <a:solidFill>
-                <a:srgbClr val="333333">
-                  <a:alpha val="100000"/>
-                </a:srgbClr>
-              </a:solidFill>
-              <a:prstDash val="solid"/>
-              <a:round/>
-            </a:ln>
-          </p:spPr>
-          <p:txBody>
-            <a:bodyPr/>
-            <a:lstStyle/>
-            <a:p/>
-          </p:txBody>
-        </p:sp>
-        <p:sp>
-          <p:nvSpPr>
-            <p:cNvPr id="46" name="tx46"/>
+            <p:cNvPr id="45" name="tx45"/>
             <p:cNvSpPr/>
             <p:nvPr/>
           </p:nvSpPr>
@@ -6481,7 +6395,7 @@
         </p:sp>
         <p:sp>
           <p:nvSpPr>
-            <p:cNvPr id="47" name="tx47"/>
+            <p:cNvPr id="46" name="tx46"/>
             <p:cNvSpPr/>
             <p:nvPr/>
           </p:nvSpPr>
@@ -6527,7 +6441,7 @@
         </p:sp>
         <p:sp>
           <p:nvSpPr>
-            <p:cNvPr id="48" name="tx48"/>
+            <p:cNvPr id="47" name="tx47"/>
             <p:cNvSpPr/>
             <p:nvPr/>
           </p:nvSpPr>
@@ -6573,7 +6487,7 @@
         </p:sp>
         <p:sp>
           <p:nvSpPr>
-            <p:cNvPr id="49" name="tx49"/>
+            <p:cNvPr id="48" name="tx48"/>
             <p:cNvSpPr/>
             <p:nvPr/>
           </p:nvSpPr>
@@ -6619,7 +6533,7 @@
         </p:sp>
         <p:sp>
           <p:nvSpPr>
-            <p:cNvPr id="50" name="tx50"/>
+            <p:cNvPr id="49" name="tx49"/>
             <p:cNvSpPr/>
             <p:nvPr/>
           </p:nvSpPr>
@@ -6665,14 +6579,14 @@
         </p:sp>
         <p:sp>
           <p:nvSpPr>
-            <p:cNvPr id="51" name="tx51"/>
-            <p:cNvSpPr/>
-            <p:nvPr/>
-          </p:nvSpPr>
-          <p:spPr>
-            <a:xfrm>
-              <a:off x="830883" y="5456905"/>
-              <a:ext cx="161574" cy="80101"/>
+            <p:cNvPr id="50" name="tx50"/>
+            <p:cNvSpPr/>
+            <p:nvPr/>
+          </p:nvSpPr>
+          <p:spPr>
+            <a:xfrm>
+              <a:off x="781231" y="5456905"/>
+              <a:ext cx="260878" cy="80101"/>
             </a:xfrm>
             <a:prstGeom prst="rect">
               <a:avLst/>
@@ -6704,21 +6618,21 @@
                   <a:latin typeface="Helvetica"/>
                   <a:cs typeface="Helvetica"/>
                 </a:rPr>
-                <a:t>-60</a:t>
+                <a:t>-60%</a:t>
               </a:r>
             </a:p>
           </p:txBody>
         </p:sp>
         <p:sp>
           <p:nvSpPr>
-            <p:cNvPr id="52" name="tx52"/>
-            <p:cNvSpPr/>
-            <p:nvPr/>
-          </p:nvSpPr>
-          <p:spPr>
-            <a:xfrm>
-              <a:off x="1470346" y="5456905"/>
-              <a:ext cx="161574" cy="80101"/>
+            <p:cNvPr id="51" name="tx51"/>
+            <p:cNvSpPr/>
+            <p:nvPr/>
+          </p:nvSpPr>
+          <p:spPr>
+            <a:xfrm>
+              <a:off x="1420695" y="5456905"/>
+              <a:ext cx="260878" cy="80101"/>
             </a:xfrm>
             <a:prstGeom prst="rect">
               <a:avLst/>
@@ -6750,21 +6664,21 @@
                   <a:latin typeface="Helvetica"/>
                   <a:cs typeface="Helvetica"/>
                 </a:rPr>
-                <a:t>-50</a:t>
+                <a:t>-50%</a:t>
               </a:r>
             </a:p>
           </p:txBody>
         </p:sp>
         <p:sp>
           <p:nvSpPr>
-            <p:cNvPr id="53" name="tx53"/>
-            <p:cNvSpPr/>
-            <p:nvPr/>
-          </p:nvSpPr>
-          <p:spPr>
-            <a:xfrm>
-              <a:off x="2109810" y="5456905"/>
-              <a:ext cx="161574" cy="80101"/>
+            <p:cNvPr id="52" name="tx52"/>
+            <p:cNvSpPr/>
+            <p:nvPr/>
+          </p:nvSpPr>
+          <p:spPr>
+            <a:xfrm>
+              <a:off x="2060159" y="5456905"/>
+              <a:ext cx="260878" cy="80101"/>
             </a:xfrm>
             <a:prstGeom prst="rect">
               <a:avLst/>
@@ -6796,21 +6710,21 @@
                   <a:latin typeface="Helvetica"/>
                   <a:cs typeface="Helvetica"/>
                 </a:rPr>
-                <a:t>-40</a:t>
+                <a:t>-40%</a:t>
               </a:r>
             </a:p>
           </p:txBody>
         </p:sp>
         <p:sp>
           <p:nvSpPr>
-            <p:cNvPr id="54" name="tx54"/>
-            <p:cNvSpPr/>
-            <p:nvPr/>
-          </p:nvSpPr>
-          <p:spPr>
-            <a:xfrm>
-              <a:off x="2749274" y="5456905"/>
-              <a:ext cx="161574" cy="80101"/>
+            <p:cNvPr id="53" name="tx53"/>
+            <p:cNvSpPr/>
+            <p:nvPr/>
+          </p:nvSpPr>
+          <p:spPr>
+            <a:xfrm>
+              <a:off x="2699622" y="5456905"/>
+              <a:ext cx="260878" cy="80101"/>
             </a:xfrm>
             <a:prstGeom prst="rect">
               <a:avLst/>
@@ -6842,21 +6756,21 @@
                   <a:latin typeface="Helvetica"/>
                   <a:cs typeface="Helvetica"/>
                 </a:rPr>
-                <a:t>-30</a:t>
+                <a:t>-30%</a:t>
               </a:r>
             </a:p>
           </p:txBody>
         </p:sp>
         <p:sp>
           <p:nvSpPr>
-            <p:cNvPr id="55" name="tx55"/>
-            <p:cNvSpPr/>
-            <p:nvPr/>
-          </p:nvSpPr>
-          <p:spPr>
-            <a:xfrm>
-              <a:off x="3388738" y="5456905"/>
-              <a:ext cx="161574" cy="80101"/>
+            <p:cNvPr id="54" name="tx54"/>
+            <p:cNvSpPr/>
+            <p:nvPr/>
+          </p:nvSpPr>
+          <p:spPr>
+            <a:xfrm>
+              <a:off x="3339086" y="5456905"/>
+              <a:ext cx="260878" cy="80101"/>
             </a:xfrm>
             <a:prstGeom prst="rect">
               <a:avLst/>
@@ -6888,21 +6802,21 @@
                   <a:latin typeface="Helvetica"/>
                   <a:cs typeface="Helvetica"/>
                 </a:rPr>
-                <a:t>-20</a:t>
+                <a:t>-20%</a:t>
               </a:r>
             </a:p>
           </p:txBody>
         </p:sp>
         <p:sp>
           <p:nvSpPr>
-            <p:cNvPr id="56" name="tx56"/>
-            <p:cNvSpPr/>
-            <p:nvPr/>
-          </p:nvSpPr>
-          <p:spPr>
-            <a:xfrm>
-              <a:off x="4028202" y="5456905"/>
-              <a:ext cx="161574" cy="80101"/>
+            <p:cNvPr id="55" name="tx55"/>
+            <p:cNvSpPr/>
+            <p:nvPr/>
+          </p:nvSpPr>
+          <p:spPr>
+            <a:xfrm>
+              <a:off x="3978550" y="5456905"/>
+              <a:ext cx="260878" cy="80101"/>
             </a:xfrm>
             <a:prstGeom prst="rect">
               <a:avLst/>
@@ -6934,21 +6848,21 @@
                   <a:latin typeface="Helvetica"/>
                   <a:cs typeface="Helvetica"/>
                 </a:rPr>
-                <a:t>-10</a:t>
+                <a:t>-10%</a:t>
               </a:r>
             </a:p>
           </p:txBody>
         </p:sp>
         <p:sp>
           <p:nvSpPr>
-            <p:cNvPr id="57" name="tx57"/>
-            <p:cNvSpPr/>
-            <p:nvPr/>
-          </p:nvSpPr>
-          <p:spPr>
-            <a:xfrm>
-              <a:off x="4717364" y="5456905"/>
-              <a:ext cx="62179" cy="80101"/>
+            <p:cNvPr id="56" name="tx56"/>
+            <p:cNvSpPr/>
+            <p:nvPr/>
+          </p:nvSpPr>
+          <p:spPr>
+            <a:xfrm>
+              <a:off x="4667712" y="5456905"/>
+              <a:ext cx="161483" cy="80101"/>
             </a:xfrm>
             <a:prstGeom prst="rect">
               <a:avLst/>
@@ -6980,21 +6894,21 @@
                   <a:latin typeface="Helvetica"/>
                   <a:cs typeface="Helvetica"/>
                 </a:rPr>
-                <a:t>0</a:t>
+                <a:t>0%</a:t>
               </a:r>
             </a:p>
           </p:txBody>
         </p:sp>
         <p:sp>
           <p:nvSpPr>
-            <p:cNvPr id="58" name="tx58"/>
-            <p:cNvSpPr/>
-            <p:nvPr/>
-          </p:nvSpPr>
-          <p:spPr>
-            <a:xfrm>
-              <a:off x="5325738" y="5456905"/>
-              <a:ext cx="124358" cy="80101"/>
+            <p:cNvPr id="57" name="tx57"/>
+            <p:cNvSpPr/>
+            <p:nvPr/>
+          </p:nvSpPr>
+          <p:spPr>
+            <a:xfrm>
+              <a:off x="5276086" y="5456905"/>
+              <a:ext cx="223662" cy="80101"/>
             </a:xfrm>
             <a:prstGeom prst="rect">
               <a:avLst/>
@@ -7026,21 +6940,21 @@
                   <a:latin typeface="Helvetica"/>
                   <a:cs typeface="Helvetica"/>
                 </a:rPr>
-                <a:t>10</a:t>
+                <a:t>10%</a:t>
               </a:r>
             </a:p>
           </p:txBody>
         </p:sp>
         <p:sp>
           <p:nvSpPr>
-            <p:cNvPr id="59" name="tx59"/>
-            <p:cNvSpPr/>
-            <p:nvPr/>
-          </p:nvSpPr>
-          <p:spPr>
-            <a:xfrm>
-              <a:off x="5965202" y="5456905"/>
-              <a:ext cx="124358" cy="80101"/>
+            <p:cNvPr id="58" name="tx58"/>
+            <p:cNvSpPr/>
+            <p:nvPr/>
+          </p:nvSpPr>
+          <p:spPr>
+            <a:xfrm>
+              <a:off x="5915550" y="5456905"/>
+              <a:ext cx="223662" cy="80101"/>
             </a:xfrm>
             <a:prstGeom prst="rect">
               <a:avLst/>
@@ -7072,21 +6986,21 @@
                   <a:latin typeface="Helvetica"/>
                   <a:cs typeface="Helvetica"/>
                 </a:rPr>
-                <a:t>20</a:t>
+                <a:t>20%</a:t>
               </a:r>
             </a:p>
           </p:txBody>
         </p:sp>
         <p:sp>
           <p:nvSpPr>
-            <p:cNvPr id="60" name="tx60"/>
-            <p:cNvSpPr/>
-            <p:nvPr/>
-          </p:nvSpPr>
-          <p:spPr>
-            <a:xfrm>
-              <a:off x="6604666" y="5456905"/>
-              <a:ext cx="124358" cy="80101"/>
+            <p:cNvPr id="59" name="tx59"/>
+            <p:cNvSpPr/>
+            <p:nvPr/>
+          </p:nvSpPr>
+          <p:spPr>
+            <a:xfrm>
+              <a:off x="6555014" y="5456905"/>
+              <a:ext cx="223662" cy="80101"/>
             </a:xfrm>
             <a:prstGeom prst="rect">
               <a:avLst/>
@@ -7118,21 +7032,21 @@
                   <a:latin typeface="Helvetica"/>
                   <a:cs typeface="Helvetica"/>
                 </a:rPr>
-                <a:t>30</a:t>
+                <a:t>30%</a:t>
               </a:r>
             </a:p>
           </p:txBody>
         </p:sp>
         <p:sp>
           <p:nvSpPr>
-            <p:cNvPr id="61" name="tx61"/>
-            <p:cNvSpPr/>
-            <p:nvPr/>
-          </p:nvSpPr>
-          <p:spPr>
-            <a:xfrm>
-              <a:off x="7244130" y="5456905"/>
-              <a:ext cx="124358" cy="80101"/>
+            <p:cNvPr id="60" name="tx60"/>
+            <p:cNvSpPr/>
+            <p:nvPr/>
+          </p:nvSpPr>
+          <p:spPr>
+            <a:xfrm>
+              <a:off x="7194478" y="5456905"/>
+              <a:ext cx="223662" cy="80101"/>
             </a:xfrm>
             <a:prstGeom prst="rect">
               <a:avLst/>
@@ -7164,21 +7078,21 @@
                   <a:latin typeface="Helvetica"/>
                   <a:cs typeface="Helvetica"/>
                 </a:rPr>
-                <a:t>40</a:t>
+                <a:t>40%</a:t>
               </a:r>
             </a:p>
           </p:txBody>
         </p:sp>
         <p:sp>
           <p:nvSpPr>
-            <p:cNvPr id="62" name="tx62"/>
-            <p:cNvSpPr/>
-            <p:nvPr/>
-          </p:nvSpPr>
-          <p:spPr>
-            <a:xfrm>
-              <a:off x="7883594" y="5456905"/>
-              <a:ext cx="124358" cy="80101"/>
+            <p:cNvPr id="61" name="tx61"/>
+            <p:cNvSpPr/>
+            <p:nvPr/>
+          </p:nvSpPr>
+          <p:spPr>
+            <a:xfrm>
+              <a:off x="7833942" y="5456905"/>
+              <a:ext cx="223662" cy="80101"/>
             </a:xfrm>
             <a:prstGeom prst="rect">
               <a:avLst/>
@@ -7210,21 +7124,21 @@
                   <a:latin typeface="Helvetica"/>
                   <a:cs typeface="Helvetica"/>
                 </a:rPr>
-                <a:t>50</a:t>
+                <a:t>50%</a:t>
               </a:r>
             </a:p>
           </p:txBody>
         </p:sp>
         <p:sp>
           <p:nvSpPr>
-            <p:cNvPr id="63" name="tx63"/>
-            <p:cNvSpPr/>
-            <p:nvPr/>
-          </p:nvSpPr>
-          <p:spPr>
-            <a:xfrm>
-              <a:off x="8523058" y="5456905"/>
-              <a:ext cx="124358" cy="80101"/>
+            <p:cNvPr id="62" name="tx62"/>
+            <p:cNvSpPr/>
+            <p:nvPr/>
+          </p:nvSpPr>
+          <p:spPr>
+            <a:xfrm>
+              <a:off x="8473406" y="5456905"/>
+              <a:ext cx="223662" cy="80101"/>
             </a:xfrm>
             <a:prstGeom prst="rect">
               <a:avLst/>
@@ -7256,14 +7170,14 @@
                   <a:latin typeface="Helvetica"/>
                   <a:cs typeface="Helvetica"/>
                 </a:rPr>
-                <a:t>60</a:t>
+                <a:t>60%</a:t>
               </a:r>
             </a:p>
           </p:txBody>
         </p:sp>
         <p:sp>
           <p:nvSpPr>
-            <p:cNvPr id="64" name="tx64"/>
+            <p:cNvPr id="63" name="tx63"/>
             <p:cNvSpPr/>
             <p:nvPr/>
           </p:nvSpPr>
@@ -7309,7 +7223,7 @@
         </p:sp>
         <p:sp>
           <p:nvSpPr>
-            <p:cNvPr id="65" name="tx65"/>
+            <p:cNvPr id="64" name="tx64"/>
             <p:cNvSpPr/>
             <p:nvPr/>
           </p:nvSpPr>
@@ -7355,7 +7269,7 @@
         </p:sp>
         <p:sp>
           <p:nvSpPr>
-            <p:cNvPr id="66" name="tx66"/>
+            <p:cNvPr id="65" name="tx65"/>
             <p:cNvSpPr/>
             <p:nvPr/>
           </p:nvSpPr>
@@ -7401,7 +7315,7 @@
         </p:sp>
         <p:sp>
           <p:nvSpPr>
-            <p:cNvPr id="67" name="tx67"/>
+            <p:cNvPr id="66" name="tx66"/>
             <p:cNvSpPr/>
             <p:nvPr/>
           </p:nvSpPr>
